--- a/public/presentations/mouhassib-pro/Mouhassib-Pro-presentation-fr.pptx
+++ b/public/presentations/mouhassib-pro/Mouhassib-Pro-presentation-fr.pptx
@@ -122,14 +122,14 @@
   <p:extLst>
     <p:ext uri="{521415D9-36F7-43E2-AB2F-B90AF26B5E84}">
       <p14:sectionLst xmlns:p14="http://schemas.microsoft.com/office/powerpoint/2010/main">
-        <p14:section name="Présentation" id="{193e4e2b-ca1f-69da-89bf-eae7136b34be}">
+        <p14:section name="Présentation" id="{8f4d7c5b-de2d-58b3-1fa9-2265a0b7a52f}">
           <p14:sldIdLst>
             <p14:sldId id="256"/>
             <p14:sldId id="257"/>
             <p14:sldId id="258"/>
           </p14:sldIdLst>
         </p14:section>
-        <p14:section name="Au quotidien" id="{e90fcb34-ed3d-7a8a-152a-5aaa4d44df07}">
+        <p14:section name="Au quotidien" id="{cd4abb40-3160-16cb-a7fe-89d2c2e05d69}">
           <p14:sldIdLst>
             <p14:sldId id="259"/>
             <p14:sldId id="260"/>
@@ -137,7 +137,7 @@
             <p14:sldId id="262"/>
           </p14:sldIdLst>
         </p14:section>
-        <p14:section name="Gestion" id="{360dab1d-96cd-a638-d179-4fcb1e7a5dd4}">
+        <p14:section name="Gestion" id="{9477332d-dd06-c92d-aef7-d22048d9fecb}">
           <p14:sldIdLst>
             <p14:sldId id="263"/>
             <p14:sldId id="264"/>
@@ -145,7 +145,7 @@
             <p14:sldId id="266"/>
           </p14:sldIdLst>
         </p14:section>
-        <p14:section name="Test de charge" id="{4f95acd6-8375-4454-4826-271e95df080f}">
+        <p14:section name="Test de charge" id="{729b87ce-9fa0-0f8b-0d9e-968d65e6fe1d}">
           <p14:sldIdLst>
             <p14:sldId id="267"/>
             <p14:sldId id="268"/>
@@ -153,7 +153,7 @@
             <p14:sldId id="270"/>
           </p14:sldIdLst>
         </p14:section>
-        <p14:section name="Contact" id="{e9eb22d6-0f8b-8999-40a9-48075efd390e}">
+        <p14:section name="Contact" id="{e0e25f4f-590d-59ac-49c4-383007c80aec}">
           <p14:sldIdLst>
             <p14:sldId id="271"/>
           </p14:sldIdLst>
@@ -193,7 +193,7 @@
                 </a:solidFill>
                 <a:latin typeface="+mn-lt"/>
               </a:rPr>
-              <a:t>Ventes validées par minute (10 caisses)</a:t>
+              <a:t>Ventes validées par minute (toutes caisses confondues)</a:t>
             </a:r>
           </a:p>
         </c:rich>
@@ -304,7 +304,7 @@
                 <c:ptCount val="4"/>
                 <c:lvl>
                   <c:pt idx="0">
-                    <c:v>Besoin réel : 10 caisses, heure de pointe</c:v>
+                    <c:v>Besoin réel d'un grand magasin à l'heure de pointe</c:v>
                   </c:pt>
                   <c:pt idx="1">
                     <c:v>Capacité sur Wi-Fi faible</c:v>
@@ -1425,7 +1425,7 @@
           <a:p>
             <a:r>
               <a:rPr lang="en-US" dirty="0"/>
-              <a:t>Nous avons simulé un grand magasin : 10 caisses qui vendent en même temps sur un serveur PostgreSQL, pendant que le gérant consulte ses rapports toutes les 5 secondes. Le serveur de test est modeste : 2 processeurs et 7 Go de mémoire, comme un PC de bureau ordinaire.</a:t>
+              <a:t>Nous avons simulé un grand magasin multiposte : plusieurs caisses qui vendent en même temps sur un serveur PostgreSQL, pendant que le gérant consulte ses rapports toutes les 5 secondes. Le serveur de test est modeste : 2 processeurs et 7 Go de mémoire, comme un PC de bureau ordinaire.</a:t>
             </a:r>
             <a:endParaRPr lang="en-US" dirty="0"/>
           </a:p>
@@ -1513,7 +1513,7 @@
           <a:p>
             <a:r>
               <a:rPr lang="en-US" dirty="0"/>
-              <a:t>Même sur un PC modeste, le serveur valide plus de 6 600 ventes par minute sur câble. Un grand magasin avec 10 caisses à l'heure de pointe en fait une trentaine. Le serveur n'utilise donc même pas 1 % de sa capacité. Et sur 14 370 ventes de test, aucune erreur : le stock, la caisse et la comptabilité tombent juste.</a:t>
+              <a:t>Même sur un PC modeste, le serveur valide plus de 6 600 ventes par minute sur câble. Un grand magasin multiposte à l'heure de pointe en fait une trentaine. Le serveur n'utilise donc même pas 1 % de sa capacité. Et sur 14 370 ventes de test, aucune erreur : le stock, la caisse et la comptabilité tombent juste.</a:t>
             </a:r>
             <a:endParaRPr lang="en-US" dirty="0"/>
           </a:p>
@@ -1689,7 +1689,7 @@
           <a:p>
             <a:r>
               <a:rPr lang="en-US" dirty="0"/>
-              <a:t>En résumé : pour 10 caisses, le serveur est très largement suffisant. Le vrai risque, c'est un Wi-Fi instable. D'où nos recommandations : câble, onduleur et sauvegardes. Ce test a été fait sur une base qui reproduit le fonctionnement du logiciel ; nous le referons avec Mouhassib Pro lui-même.</a:t>
+              <a:t>En résumé : pour un magasin multiposte, le serveur est très largement suffisant. Le vrai risque, c'est un Wi-Fi instable. D'où nos recommandations : câble, onduleur et sauvegardes. Ce test a été fait sur une base qui reproduit le fonctionnement du logiciel ; nous le referons avec Mouhassib Pro lui-même.</a:t>
             </a:r>
             <a:endParaRPr lang="en-US" dirty="0"/>
           </a:p>
@@ -4788,7 +4788,7 @@
                   <a:schemeClr val="tx2"/>
                 </a:solidFill>
               </a:rPr>
-              <a:t>Test de charge : 10 caisses en même temps</a:t>
+              <a:t>Test de charge : plusieurs caisses en même temps</a:t>
             </a:r>
             <a:endParaRPr lang="en-US" sz="2800" dirty="0"/>
           </a:p>
@@ -4837,8 +4837,8 @@
         </p:blipFill>
         <p:spPr>
           <a:xfrm>
-            <a:off x="502920" y="1207008"/>
-            <a:ext cx="182880" cy="182880"/>
+            <a:off x="612648" y="1197864"/>
+            <a:ext cx="219456" cy="219456"/>
           </a:xfrm>
           <a:prstGeom prst="rect">
             <a:avLst/>
@@ -4847,43 +4847,7 @@
       </p:pic>
       <p:sp>
         <p:nvSpPr>
-          <p:cNvPr id="5" name="Numéro caisse"/>
-          <p:cNvSpPr txBox="1"/>
-          <p:nvPr/>
-        </p:nvSpPr>
-        <p:spPr>
-          <a:xfrm>
-            <a:off x="731520" y="1097280"/>
-            <a:ext cx="237744" cy="411480"/>
-          </a:xfrm>
-          <a:prstGeom prst="rect">
-            <a:avLst/>
-          </a:prstGeom>
-          <a:noFill/>
-          <a:ln/>
-        </p:spPr>
-        <p:txBody>
-          <a:bodyPr wrap="square" lIns="0" tIns="0" rIns="0" bIns="0" rtlCol="0" anchor="ctr"/>
-          <a:lstStyle/>
-          <a:p>
-            <a:pPr algn="r" indent="0" marL="0">
-              <a:buNone/>
-            </a:pPr>
-            <a:r>
-              <a:rPr lang="en-US" sz="1100" b="1" dirty="0">
-                <a:solidFill>
-                  <a:schemeClr val="tx2"/>
-                </a:solidFill>
-              </a:rPr>
-              <a:t>1</a:t>
-            </a:r>
-            <a:endParaRPr lang="en-US" sz="1100" dirty="0"/>
-          </a:p>
-        </p:txBody>
-      </p:sp>
-      <p:sp>
-        <p:nvSpPr>
-          <p:cNvPr id="6" name="Caisse 2"/>
+          <p:cNvPr id="5" name="Caisse 2"/>
           <p:cNvSpPr/>
           <p:nvPr/>
         </p:nvSpPr>
@@ -4910,7 +4874,7 @@
       </p:sp>
       <p:pic>
         <p:nvPicPr>
-          <p:cNvPr id="7" name="Caisse icône" descr="preencoded.png">    </p:cNvPr>
+          <p:cNvPr id="6" name="Caisse icône" descr="preencoded.png">    </p:cNvPr>
           <p:cNvPicPr>
             <a:picLocks noChangeAspect="1"/>
           </p:cNvPicPr>
@@ -4924,8 +4888,8 @@
         </p:blipFill>
         <p:spPr>
           <a:xfrm>
-            <a:off x="1106424" y="1207008"/>
-            <a:ext cx="182880" cy="182880"/>
+            <a:off x="1216152" y="1197864"/>
+            <a:ext cx="219456" cy="219456"/>
           </a:xfrm>
           <a:prstGeom prst="rect">
             <a:avLst/>
@@ -4934,43 +4898,7 @@
       </p:pic>
       <p:sp>
         <p:nvSpPr>
-          <p:cNvPr id="8" name="Numéro caisse"/>
-          <p:cNvSpPr txBox="1"/>
-          <p:nvPr/>
-        </p:nvSpPr>
-        <p:spPr>
-          <a:xfrm>
-            <a:off x="1335024" y="1097280"/>
-            <a:ext cx="237744" cy="411480"/>
-          </a:xfrm>
-          <a:prstGeom prst="rect">
-            <a:avLst/>
-          </a:prstGeom>
-          <a:noFill/>
-          <a:ln/>
-        </p:spPr>
-        <p:txBody>
-          <a:bodyPr wrap="square" lIns="0" tIns="0" rIns="0" bIns="0" rtlCol="0" anchor="ctr"/>
-          <a:lstStyle/>
-          <a:p>
-            <a:pPr algn="r" indent="0" marL="0">
-              <a:buNone/>
-            </a:pPr>
-            <a:r>
-              <a:rPr lang="en-US" sz="1100" b="1" dirty="0">
-                <a:solidFill>
-                  <a:schemeClr val="tx2"/>
-                </a:solidFill>
-              </a:rPr>
-              <a:t>2</a:t>
-            </a:r>
-            <a:endParaRPr lang="en-US" sz="1100" dirty="0"/>
-          </a:p>
-        </p:txBody>
-      </p:sp>
-      <p:sp>
-        <p:nvSpPr>
-          <p:cNvPr id="9" name="Caisse 3"/>
+          <p:cNvPr id="7" name="Caisse 3"/>
           <p:cNvSpPr/>
           <p:nvPr/>
         </p:nvSpPr>
@@ -4997,7 +4925,7 @@
       </p:sp>
       <p:pic>
         <p:nvPicPr>
-          <p:cNvPr id="10" name="Caisse icône" descr="preencoded.png">    </p:cNvPr>
+          <p:cNvPr id="8" name="Caisse icône" descr="preencoded.png">    </p:cNvPr>
           <p:cNvPicPr>
             <a:picLocks noChangeAspect="1"/>
           </p:cNvPicPr>
@@ -5011,8 +4939,8 @@
         </p:blipFill>
         <p:spPr>
           <a:xfrm>
-            <a:off x="1709928" y="1207008"/>
-            <a:ext cx="182880" cy="182880"/>
+            <a:off x="1819656" y="1197864"/>
+            <a:ext cx="219456" cy="219456"/>
           </a:xfrm>
           <a:prstGeom prst="rect">
             <a:avLst/>
@@ -5021,43 +4949,7 @@
       </p:pic>
       <p:sp>
         <p:nvSpPr>
-          <p:cNvPr id="11" name="Numéro caisse"/>
-          <p:cNvSpPr txBox="1"/>
-          <p:nvPr/>
-        </p:nvSpPr>
-        <p:spPr>
-          <a:xfrm>
-            <a:off x="1938528" y="1097280"/>
-            <a:ext cx="237744" cy="411480"/>
-          </a:xfrm>
-          <a:prstGeom prst="rect">
-            <a:avLst/>
-          </a:prstGeom>
-          <a:noFill/>
-          <a:ln/>
-        </p:spPr>
-        <p:txBody>
-          <a:bodyPr wrap="square" lIns="0" tIns="0" rIns="0" bIns="0" rtlCol="0" anchor="ctr"/>
-          <a:lstStyle/>
-          <a:p>
-            <a:pPr algn="r" indent="0" marL="0">
-              <a:buNone/>
-            </a:pPr>
-            <a:r>
-              <a:rPr lang="en-US" sz="1100" b="1" dirty="0">
-                <a:solidFill>
-                  <a:schemeClr val="tx2"/>
-                </a:solidFill>
-              </a:rPr>
-              <a:t>3</a:t>
-            </a:r>
-            <a:endParaRPr lang="en-US" sz="1100" dirty="0"/>
-          </a:p>
-        </p:txBody>
-      </p:sp>
-      <p:sp>
-        <p:nvSpPr>
-          <p:cNvPr id="12" name="Caisse 4"/>
+          <p:cNvPr id="9" name="Caisse 4"/>
           <p:cNvSpPr/>
           <p:nvPr/>
         </p:nvSpPr>
@@ -5084,7 +4976,7 @@
       </p:sp>
       <p:pic>
         <p:nvPicPr>
-          <p:cNvPr id="13" name="Caisse icône" descr="preencoded.png">    </p:cNvPr>
+          <p:cNvPr id="10" name="Caisse icône" descr="preencoded.png">    </p:cNvPr>
           <p:cNvPicPr>
             <a:picLocks noChangeAspect="1"/>
           </p:cNvPicPr>
@@ -5098,8 +4990,8 @@
         </p:blipFill>
         <p:spPr>
           <a:xfrm>
-            <a:off x="2313432" y="1207008"/>
-            <a:ext cx="182880" cy="182880"/>
+            <a:off x="2423160" y="1197864"/>
+            <a:ext cx="219456" cy="219456"/>
           </a:xfrm>
           <a:prstGeom prst="rect">
             <a:avLst/>
@@ -5108,43 +5000,7 @@
       </p:pic>
       <p:sp>
         <p:nvSpPr>
-          <p:cNvPr id="14" name="Numéro caisse"/>
-          <p:cNvSpPr txBox="1"/>
-          <p:nvPr/>
-        </p:nvSpPr>
-        <p:spPr>
-          <a:xfrm>
-            <a:off x="2542032" y="1097280"/>
-            <a:ext cx="237744" cy="411480"/>
-          </a:xfrm>
-          <a:prstGeom prst="rect">
-            <a:avLst/>
-          </a:prstGeom>
-          <a:noFill/>
-          <a:ln/>
-        </p:spPr>
-        <p:txBody>
-          <a:bodyPr wrap="square" lIns="0" tIns="0" rIns="0" bIns="0" rtlCol="0" anchor="ctr"/>
-          <a:lstStyle/>
-          <a:p>
-            <a:pPr algn="r" indent="0" marL="0">
-              <a:buNone/>
-            </a:pPr>
-            <a:r>
-              <a:rPr lang="en-US" sz="1100" b="1" dirty="0">
-                <a:solidFill>
-                  <a:schemeClr val="tx2"/>
-                </a:solidFill>
-              </a:rPr>
-              <a:t>4</a:t>
-            </a:r>
-            <a:endParaRPr lang="en-US" sz="1100" dirty="0"/>
-          </a:p>
-        </p:txBody>
-      </p:sp>
-      <p:sp>
-        <p:nvSpPr>
-          <p:cNvPr id="15" name="Caisse 5"/>
+          <p:cNvPr id="11" name="Caisse 5"/>
           <p:cNvSpPr/>
           <p:nvPr/>
         </p:nvSpPr>
@@ -5171,7 +5027,7 @@
       </p:sp>
       <p:pic>
         <p:nvPicPr>
-          <p:cNvPr id="16" name="Caisse icône" descr="preencoded.png">    </p:cNvPr>
+          <p:cNvPr id="12" name="Caisse icône" descr="preencoded.png">    </p:cNvPr>
           <p:cNvPicPr>
             <a:picLocks noChangeAspect="1"/>
           </p:cNvPicPr>
@@ -5185,8 +5041,8 @@
         </p:blipFill>
         <p:spPr>
           <a:xfrm>
-            <a:off x="2916936" y="1207008"/>
-            <a:ext cx="182880" cy="182880"/>
+            <a:off x="3026664" y="1197864"/>
+            <a:ext cx="219456" cy="219456"/>
           </a:xfrm>
           <a:prstGeom prst="rect">
             <a:avLst/>
@@ -5195,43 +5051,7 @@
       </p:pic>
       <p:sp>
         <p:nvSpPr>
-          <p:cNvPr id="17" name="Numéro caisse"/>
-          <p:cNvSpPr txBox="1"/>
-          <p:nvPr/>
-        </p:nvSpPr>
-        <p:spPr>
-          <a:xfrm>
-            <a:off x="3145536" y="1097280"/>
-            <a:ext cx="237744" cy="411480"/>
-          </a:xfrm>
-          <a:prstGeom prst="rect">
-            <a:avLst/>
-          </a:prstGeom>
-          <a:noFill/>
-          <a:ln/>
-        </p:spPr>
-        <p:txBody>
-          <a:bodyPr wrap="square" lIns="0" tIns="0" rIns="0" bIns="0" rtlCol="0" anchor="ctr"/>
-          <a:lstStyle/>
-          <a:p>
-            <a:pPr algn="r" indent="0" marL="0">
-              <a:buNone/>
-            </a:pPr>
-            <a:r>
-              <a:rPr lang="en-US" sz="1100" b="1" dirty="0">
-                <a:solidFill>
-                  <a:schemeClr val="tx2"/>
-                </a:solidFill>
-              </a:rPr>
-              <a:t>5</a:t>
-            </a:r>
-            <a:endParaRPr lang="en-US" sz="1100" dirty="0"/>
-          </a:p>
-        </p:txBody>
-      </p:sp>
-      <p:sp>
-        <p:nvSpPr>
-          <p:cNvPr id="18" name="Caisse 6"/>
+          <p:cNvPr id="13" name="Caisse 6"/>
           <p:cNvSpPr/>
           <p:nvPr/>
         </p:nvSpPr>
@@ -5258,7 +5078,7 @@
       </p:sp>
       <p:pic>
         <p:nvPicPr>
-          <p:cNvPr id="19" name="Caisse icône" descr="preencoded.png">    </p:cNvPr>
+          <p:cNvPr id="14" name="Caisse icône" descr="preencoded.png">    </p:cNvPr>
           <p:cNvPicPr>
             <a:picLocks noChangeAspect="1"/>
           </p:cNvPicPr>
@@ -5272,8 +5092,8 @@
         </p:blipFill>
         <p:spPr>
           <a:xfrm>
-            <a:off x="502920" y="1709928"/>
-            <a:ext cx="182880" cy="182880"/>
+            <a:off x="612648" y="1700784"/>
+            <a:ext cx="219456" cy="219456"/>
           </a:xfrm>
           <a:prstGeom prst="rect">
             <a:avLst/>
@@ -5282,43 +5102,7 @@
       </p:pic>
       <p:sp>
         <p:nvSpPr>
-          <p:cNvPr id="20" name="Numéro caisse"/>
-          <p:cNvSpPr txBox="1"/>
-          <p:nvPr/>
-        </p:nvSpPr>
-        <p:spPr>
-          <a:xfrm>
-            <a:off x="731520" y="1600200"/>
-            <a:ext cx="237744" cy="411480"/>
-          </a:xfrm>
-          <a:prstGeom prst="rect">
-            <a:avLst/>
-          </a:prstGeom>
-          <a:noFill/>
-          <a:ln/>
-        </p:spPr>
-        <p:txBody>
-          <a:bodyPr wrap="square" lIns="0" tIns="0" rIns="0" bIns="0" rtlCol="0" anchor="ctr"/>
-          <a:lstStyle/>
-          <a:p>
-            <a:pPr algn="r" indent="0" marL="0">
-              <a:buNone/>
-            </a:pPr>
-            <a:r>
-              <a:rPr lang="en-US" sz="1100" b="1" dirty="0">
-                <a:solidFill>
-                  <a:schemeClr val="tx2"/>
-                </a:solidFill>
-              </a:rPr>
-              <a:t>6</a:t>
-            </a:r>
-            <a:endParaRPr lang="en-US" sz="1100" dirty="0"/>
-          </a:p>
-        </p:txBody>
-      </p:sp>
-      <p:sp>
-        <p:nvSpPr>
-          <p:cNvPr id="21" name="Caisse 7"/>
+          <p:cNvPr id="15" name="Caisse 7"/>
           <p:cNvSpPr/>
           <p:nvPr/>
         </p:nvSpPr>
@@ -5345,7 +5129,7 @@
       </p:sp>
       <p:pic>
         <p:nvPicPr>
-          <p:cNvPr id="22" name="Caisse icône" descr="preencoded.png">    </p:cNvPr>
+          <p:cNvPr id="16" name="Caisse icône" descr="preencoded.png">    </p:cNvPr>
           <p:cNvPicPr>
             <a:picLocks noChangeAspect="1"/>
           </p:cNvPicPr>
@@ -5359,8 +5143,8 @@
         </p:blipFill>
         <p:spPr>
           <a:xfrm>
-            <a:off x="1106424" y="1709928"/>
-            <a:ext cx="182880" cy="182880"/>
+            <a:off x="1216152" y="1700784"/>
+            <a:ext cx="219456" cy="219456"/>
           </a:xfrm>
           <a:prstGeom prst="rect">
             <a:avLst/>
@@ -5369,43 +5153,7 @@
       </p:pic>
       <p:sp>
         <p:nvSpPr>
-          <p:cNvPr id="23" name="Numéro caisse"/>
-          <p:cNvSpPr txBox="1"/>
-          <p:nvPr/>
-        </p:nvSpPr>
-        <p:spPr>
-          <a:xfrm>
-            <a:off x="1335024" y="1600200"/>
-            <a:ext cx="237744" cy="411480"/>
-          </a:xfrm>
-          <a:prstGeom prst="rect">
-            <a:avLst/>
-          </a:prstGeom>
-          <a:noFill/>
-          <a:ln/>
-        </p:spPr>
-        <p:txBody>
-          <a:bodyPr wrap="square" lIns="0" tIns="0" rIns="0" bIns="0" rtlCol="0" anchor="ctr"/>
-          <a:lstStyle/>
-          <a:p>
-            <a:pPr algn="r" indent="0" marL="0">
-              <a:buNone/>
-            </a:pPr>
-            <a:r>
-              <a:rPr lang="en-US" sz="1100" b="1" dirty="0">
-                <a:solidFill>
-                  <a:schemeClr val="tx2"/>
-                </a:solidFill>
-              </a:rPr>
-              <a:t>7</a:t>
-            </a:r>
-            <a:endParaRPr lang="en-US" sz="1100" dirty="0"/>
-          </a:p>
-        </p:txBody>
-      </p:sp>
-      <p:sp>
-        <p:nvSpPr>
-          <p:cNvPr id="24" name="Caisse 8"/>
+          <p:cNvPr id="17" name="Caisse 8"/>
           <p:cNvSpPr/>
           <p:nvPr/>
         </p:nvSpPr>
@@ -5432,7 +5180,7 @@
       </p:sp>
       <p:pic>
         <p:nvPicPr>
-          <p:cNvPr id="25" name="Caisse icône" descr="preencoded.png">    </p:cNvPr>
+          <p:cNvPr id="18" name="Caisse icône" descr="preencoded.png">    </p:cNvPr>
           <p:cNvPicPr>
             <a:picLocks noChangeAspect="1"/>
           </p:cNvPicPr>
@@ -5446,8 +5194,8 @@
         </p:blipFill>
         <p:spPr>
           <a:xfrm>
-            <a:off x="1709928" y="1709928"/>
-            <a:ext cx="182880" cy="182880"/>
+            <a:off x="1819656" y="1700784"/>
+            <a:ext cx="219456" cy="219456"/>
           </a:xfrm>
           <a:prstGeom prst="rect">
             <a:avLst/>
@@ -5456,43 +5204,7 @@
       </p:pic>
       <p:sp>
         <p:nvSpPr>
-          <p:cNvPr id="26" name="Numéro caisse"/>
-          <p:cNvSpPr txBox="1"/>
-          <p:nvPr/>
-        </p:nvSpPr>
-        <p:spPr>
-          <a:xfrm>
-            <a:off x="1938528" y="1600200"/>
-            <a:ext cx="237744" cy="411480"/>
-          </a:xfrm>
-          <a:prstGeom prst="rect">
-            <a:avLst/>
-          </a:prstGeom>
-          <a:noFill/>
-          <a:ln/>
-        </p:spPr>
-        <p:txBody>
-          <a:bodyPr wrap="square" lIns="0" tIns="0" rIns="0" bIns="0" rtlCol="0" anchor="ctr"/>
-          <a:lstStyle/>
-          <a:p>
-            <a:pPr algn="r" indent="0" marL="0">
-              <a:buNone/>
-            </a:pPr>
-            <a:r>
-              <a:rPr lang="en-US" sz="1100" b="1" dirty="0">
-                <a:solidFill>
-                  <a:schemeClr val="tx2"/>
-                </a:solidFill>
-              </a:rPr>
-              <a:t>8</a:t>
-            </a:r>
-            <a:endParaRPr lang="en-US" sz="1100" dirty="0"/>
-          </a:p>
-        </p:txBody>
-      </p:sp>
-      <p:sp>
-        <p:nvSpPr>
-          <p:cNvPr id="27" name="Caisse 9"/>
+          <p:cNvPr id="19" name="Caisse 9"/>
           <p:cNvSpPr/>
           <p:nvPr/>
         </p:nvSpPr>
@@ -5519,7 +5231,7 @@
       </p:sp>
       <p:pic>
         <p:nvPicPr>
-          <p:cNvPr id="28" name="Caisse icône" descr="preencoded.png">    </p:cNvPr>
+          <p:cNvPr id="20" name="Caisse icône" descr="preencoded.png">    </p:cNvPr>
           <p:cNvPicPr>
             <a:picLocks noChangeAspect="1"/>
           </p:cNvPicPr>
@@ -5533,8 +5245,8 @@
         </p:blipFill>
         <p:spPr>
           <a:xfrm>
-            <a:off x="2313432" y="1709928"/>
-            <a:ext cx="182880" cy="182880"/>
+            <a:off x="2423160" y="1700784"/>
+            <a:ext cx="219456" cy="219456"/>
           </a:xfrm>
           <a:prstGeom prst="rect">
             <a:avLst/>
@@ -5543,43 +5255,7 @@
       </p:pic>
       <p:sp>
         <p:nvSpPr>
-          <p:cNvPr id="29" name="Numéro caisse"/>
-          <p:cNvSpPr txBox="1"/>
-          <p:nvPr/>
-        </p:nvSpPr>
-        <p:spPr>
-          <a:xfrm>
-            <a:off x="2542032" y="1600200"/>
-            <a:ext cx="237744" cy="411480"/>
-          </a:xfrm>
-          <a:prstGeom prst="rect">
-            <a:avLst/>
-          </a:prstGeom>
-          <a:noFill/>
-          <a:ln/>
-        </p:spPr>
-        <p:txBody>
-          <a:bodyPr wrap="square" lIns="0" tIns="0" rIns="0" bIns="0" rtlCol="0" anchor="ctr"/>
-          <a:lstStyle/>
-          <a:p>
-            <a:pPr algn="r" indent="0" marL="0">
-              <a:buNone/>
-            </a:pPr>
-            <a:r>
-              <a:rPr lang="en-US" sz="1100" b="1" dirty="0">
-                <a:solidFill>
-                  <a:schemeClr val="tx2"/>
-                </a:solidFill>
-              </a:rPr>
-              <a:t>9</a:t>
-            </a:r>
-            <a:endParaRPr lang="en-US" sz="1100" dirty="0"/>
-          </a:p>
-        </p:txBody>
-      </p:sp>
-      <p:sp>
-        <p:nvSpPr>
-          <p:cNvPr id="30" name="Caisse 10"/>
+          <p:cNvPr id="21" name="Caisse 10"/>
           <p:cNvSpPr/>
           <p:nvPr/>
         </p:nvSpPr>
@@ -5606,7 +5282,7 @@
       </p:sp>
       <p:pic>
         <p:nvPicPr>
-          <p:cNvPr id="31" name="Caisse icône" descr="preencoded.png">    </p:cNvPr>
+          <p:cNvPr id="22" name="Caisse icône" descr="preencoded.png">    </p:cNvPr>
           <p:cNvPicPr>
             <a:picLocks noChangeAspect="1"/>
           </p:cNvPicPr>
@@ -5620,8 +5296,8 @@
         </p:blipFill>
         <p:spPr>
           <a:xfrm>
-            <a:off x="2916936" y="1709928"/>
-            <a:ext cx="182880" cy="182880"/>
+            <a:off x="3026664" y="1700784"/>
+            <a:ext cx="219456" cy="219456"/>
           </a:xfrm>
           <a:prstGeom prst="rect">
             <a:avLst/>
@@ -5630,43 +5306,7 @@
       </p:pic>
       <p:sp>
         <p:nvSpPr>
-          <p:cNvPr id="32" name="Numéro caisse"/>
-          <p:cNvSpPr txBox="1"/>
-          <p:nvPr/>
-        </p:nvSpPr>
-        <p:spPr>
-          <a:xfrm>
-            <a:off x="3145536" y="1600200"/>
-            <a:ext cx="237744" cy="411480"/>
-          </a:xfrm>
-          <a:prstGeom prst="rect">
-            <a:avLst/>
-          </a:prstGeom>
-          <a:noFill/>
-          <a:ln/>
-        </p:spPr>
-        <p:txBody>
-          <a:bodyPr wrap="square" lIns="0" tIns="0" rIns="0" bIns="0" rtlCol="0" anchor="ctr"/>
-          <a:lstStyle/>
-          <a:p>
-            <a:pPr algn="r" indent="0" marL="0">
-              <a:buNone/>
-            </a:pPr>
-            <a:r>
-              <a:rPr lang="en-US" sz="1100" b="1" dirty="0">
-                <a:solidFill>
-                  <a:schemeClr val="tx2"/>
-                </a:solidFill>
-              </a:rPr>
-              <a:t>10</a:t>
-            </a:r>
-            <a:endParaRPr lang="en-US" sz="1100" dirty="0"/>
-          </a:p>
-        </p:txBody>
-      </p:sp>
-      <p:sp>
-        <p:nvSpPr>
-          <p:cNvPr id="33" name="Liaison caisses"/>
+          <p:cNvPr id="23" name="Liaison caisses"/>
           <p:cNvSpPr/>
           <p:nvPr/>
         </p:nvSpPr>
@@ -5689,14 +5329,14 @@
       </p:sp>
       <p:sp>
         <p:nvSpPr>
-          <p:cNvPr id="34" name="Légende caisses"/>
+          <p:cNvPr id="24" name="Légende caisses"/>
           <p:cNvSpPr txBox="1"/>
           <p:nvPr/>
         </p:nvSpPr>
         <p:spPr>
           <a:xfrm>
             <a:off x="1993392" y="2029968"/>
-            <a:ext cx="1097280" cy="320040"/>
+            <a:ext cx="1463040" cy="320040"/>
           </a:xfrm>
           <a:prstGeom prst="rect">
             <a:avLst/>
@@ -5717,7 +5357,7 @@
                   <a:schemeClr val="accent5"/>
                 </a:solidFill>
               </a:rPr>
-              <a:t>10 caisses</a:t>
+              <a:t>Caisses en réseau</a:t>
             </a:r>
             <a:endParaRPr lang="en-US" sz="1100" dirty="0"/>
           </a:p>
@@ -5725,7 +5365,7 @@
       </p:sp>
       <p:sp>
         <p:nvSpPr>
-          <p:cNvPr id="35" name="Switch"/>
+          <p:cNvPr id="25" name="Switch"/>
           <p:cNvSpPr/>
           <p:nvPr/>
         </p:nvSpPr>
@@ -5752,7 +5392,7 @@
       </p:sp>
       <p:pic>
         <p:nvPicPr>
-          <p:cNvPr id="36" name="Switch icône" descr="preencoded.png">    </p:cNvPr>
+          <p:cNvPr id="26" name="Switch icône" descr="preencoded.png">    </p:cNvPr>
           <p:cNvPicPr>
             <a:picLocks noChangeAspect="1"/>
           </p:cNvPicPr>
@@ -5776,7 +5416,7 @@
       </p:pic>
       <p:sp>
         <p:nvSpPr>
-          <p:cNvPr id="37" name="Switch texte"/>
+          <p:cNvPr id="27" name="Switch texte"/>
           <p:cNvSpPr txBox="1"/>
           <p:nvPr/>
         </p:nvSpPr>
@@ -5812,7 +5452,7 @@
       </p:sp>
       <p:sp>
         <p:nvSpPr>
-          <p:cNvPr id="38" name="Liaison gérant"/>
+          <p:cNvPr id="28" name="Liaison gérant"/>
           <p:cNvSpPr/>
           <p:nvPr/>
         </p:nvSpPr>
@@ -5835,7 +5475,7 @@
       </p:sp>
       <p:sp>
         <p:nvSpPr>
-          <p:cNvPr id="39" name="Gérant"/>
+          <p:cNvPr id="29" name="Gérant"/>
           <p:cNvSpPr/>
           <p:nvPr/>
         </p:nvSpPr>
@@ -5862,7 +5502,7 @@
       </p:sp>
       <p:pic>
         <p:nvPicPr>
-          <p:cNvPr id="40" name="Gérant icône" descr="preencoded.png">    </p:cNvPr>
+          <p:cNvPr id="30" name="Gérant icône" descr="preencoded.png">    </p:cNvPr>
           <p:cNvPicPr>
             <a:picLocks noChangeAspect="1"/>
           </p:cNvPicPr>
@@ -5886,7 +5526,7 @@
       </p:pic>
       <p:sp>
         <p:nvSpPr>
-          <p:cNvPr id="41" name="Gérant texte"/>
+          <p:cNvPr id="31" name="Gérant texte"/>
           <p:cNvSpPr txBox="1"/>
           <p:nvPr/>
         </p:nvSpPr>
@@ -5922,7 +5562,7 @@
       </p:sp>
       <p:sp>
         <p:nvSpPr>
-          <p:cNvPr id="42" name="Liaison serveur"/>
+          <p:cNvPr id="32" name="Liaison serveur"/>
           <p:cNvSpPr/>
           <p:nvPr/>
         </p:nvSpPr>
@@ -5945,7 +5585,7 @@
       </p:sp>
       <p:sp>
         <p:nvSpPr>
-          <p:cNvPr id="43" name="Serveur"/>
+          <p:cNvPr id="33" name="Serveur"/>
           <p:cNvSpPr/>
           <p:nvPr/>
         </p:nvSpPr>
@@ -5972,7 +5612,7 @@
       </p:sp>
       <p:pic>
         <p:nvPicPr>
-          <p:cNvPr id="44" name="Serveur icône" descr="preencoded.png">    </p:cNvPr>
+          <p:cNvPr id="34" name="Serveur icône" descr="preencoded.png">    </p:cNvPr>
           <p:cNvPicPr>
             <a:picLocks noChangeAspect="1"/>
           </p:cNvPicPr>
@@ -5996,7 +5636,7 @@
       </p:pic>
       <p:sp>
         <p:nvSpPr>
-          <p:cNvPr id="45" name="Serveur texte"/>
+          <p:cNvPr id="35" name="Serveur texte"/>
           <p:cNvSpPr txBox="1"/>
           <p:nvPr/>
         </p:nvSpPr>
@@ -6046,7 +5686,7 @@
       </p:sp>
       <p:sp>
         <p:nvSpPr>
-          <p:cNvPr id="46" name="Conditions du test"/>
+          <p:cNvPr id="36" name="Conditions du test"/>
           <p:cNvSpPr txBox="1"/>
           <p:nvPr/>
         </p:nvSpPr>
@@ -6751,7 +6391,7 @@
                   <a:schemeClr val="tx1"/>
                 </a:solidFill>
               </a:rPr>
-              <a:t>Environ 5 Ko de données. Dix caisses au rythme réel utilisent 22 kbit/s : un réseau local ordinaire en offre au moins 100 000.</a:t>
+              <a:t>Environ 5 Ko de données. Toutes les caisses ensemble, au rythme réel, utilisent 22 kbit/s : un réseau local ordinaire en offre au moins 100 000.</a:t>
             </a:r>
             <a:endParaRPr lang="en-US" sz="1600" dirty="0"/>
           </a:p>
@@ -7024,7 +6664,7 @@
                   <a:schemeClr val="tx1"/>
                 </a:solidFill>
               </a:rPr>
-              <a:t>10 caisses utilisent moins de 1 % de la capacité mesurée.</a:t>
+              <a:t>Un grand magasin multiposte utilise moins de 1 % de la capacité mesurée.</a:t>
             </a:r>
             <a:endParaRPr lang="en-US" sz="1300" dirty="0"/>
           </a:p>
@@ -7060,7 +6700,7 @@
                   <a:schemeClr val="tx1"/>
                 </a:solidFill>
               </a:rPr>
-              <a:t>10 caisses qui vendent le même article sans pause : aucune erreur, 2,5 s d'attente au pire (cas extrême).</a:t>
+              <a:t>Toutes les caisses vendent le même article sans pause : aucune erreur, 2,5 s d'attente au pire (cas extrême).</a:t>
             </a:r>
             <a:endParaRPr lang="en-US" sz="1300" dirty="0"/>
           </a:p>
